--- a/public/fun/cards/beauty/명함_미용네일피부_04_파인.pptx
+++ b/public/fun/cards/beauty/명함_미용네일피부_04_파인.pptx
@@ -3666,8 +3666,8 @@
         </p:nvSpPr>
         <p:spPr>
           <a:xfrm>
-            <a:off x="252000" y="424800"/>
-            <a:ext cx="540000" cy="237600"/>
+            <a:off x="252000" y="496800"/>
+            <a:ext cx="360000" cy="144000"/>
           </a:xfrm>
           <a:prstGeom prst="rect">
             <a:avLst/>
@@ -3682,11 +3682,11 @@
           <a:p>
             <a:pPr algn="l">
               <a:lnSpc>
-                <a:spcPts val="2175"/>
+                <a:spcPts val="927"/>
               </a:lnSpc>
             </a:pPr>
             <a:r>
-              <a:rPr sz="1500" b="1">
+              <a:rPr sz="640" b="1" spc="120">
                 <a:solidFill>
                   <a:srgbClr val="1B2230"/>
                 </a:solidFill>
@@ -3706,8 +3706,8 @@
         </p:nvSpPr>
         <p:spPr>
           <a:xfrm>
-            <a:off x="720000" y="475200"/>
-            <a:ext cx="1512000" cy="180000"/>
+            <a:off x="576000" y="475200"/>
+            <a:ext cx="1656000" cy="180000"/>
           </a:xfrm>
           <a:prstGeom prst="rect">
             <a:avLst/>
@@ -3746,8 +3746,8 @@
         </p:nvSpPr>
         <p:spPr>
           <a:xfrm>
-            <a:off x="252000" y="691200"/>
-            <a:ext cx="540000" cy="237600"/>
+            <a:off x="252000" y="763200"/>
+            <a:ext cx="360000" cy="144000"/>
           </a:xfrm>
           <a:prstGeom prst="rect">
             <a:avLst/>
@@ -3762,11 +3762,11 @@
           <a:p>
             <a:pPr algn="l">
               <a:lnSpc>
-                <a:spcPts val="2175"/>
+                <a:spcPts val="927"/>
               </a:lnSpc>
             </a:pPr>
             <a:r>
-              <a:rPr sz="1500" b="1">
+              <a:rPr sz="640" b="1" spc="120">
                 <a:solidFill>
                   <a:srgbClr val="1B2230"/>
                 </a:solidFill>
@@ -3786,8 +3786,8 @@
         </p:nvSpPr>
         <p:spPr>
           <a:xfrm>
-            <a:off x="720000" y="741600"/>
-            <a:ext cx="1512000" cy="180000"/>
+            <a:off x="576000" y="741600"/>
+            <a:ext cx="1656000" cy="180000"/>
           </a:xfrm>
           <a:prstGeom prst="rect">
             <a:avLst/>
@@ -3826,8 +3826,8 @@
         </p:nvSpPr>
         <p:spPr>
           <a:xfrm>
-            <a:off x="252000" y="957600"/>
-            <a:ext cx="540000" cy="237600"/>
+            <a:off x="252000" y="1029600"/>
+            <a:ext cx="360000" cy="144000"/>
           </a:xfrm>
           <a:prstGeom prst="rect">
             <a:avLst/>
@@ -3842,11 +3842,11 @@
           <a:p>
             <a:pPr algn="l">
               <a:lnSpc>
-                <a:spcPts val="2175"/>
+                <a:spcPts val="927"/>
               </a:lnSpc>
             </a:pPr>
             <a:r>
-              <a:rPr sz="1500" b="1">
+              <a:rPr sz="640" b="1" spc="120">
                 <a:solidFill>
                   <a:srgbClr val="1B2230"/>
                 </a:solidFill>
@@ -3866,8 +3866,8 @@
         </p:nvSpPr>
         <p:spPr>
           <a:xfrm>
-            <a:off x="720000" y="1008000"/>
-            <a:ext cx="1512000" cy="180000"/>
+            <a:off x="576000" y="1008000"/>
+            <a:ext cx="1656000" cy="180000"/>
           </a:xfrm>
           <a:prstGeom prst="rect">
             <a:avLst/>
